--- a/dist/초3/수학/자연수계산/초3_수학_자연수계산_02_세자리수의뺄셈_학생용.pptx
+++ b/dist/초3/수학/자연수계산/초3_수학_자연수계산_02_세자리수의뺄셈_학생용.pptx
@@ -120,13 +120,13 @@
   <p:extLst>
     <p:ext uri="{521415D9-36F7-43E2-AB2F-B90AF26B5E84}">
       <p14:sectionLst xmlns:p14="http://schemas.microsoft.com/office/powerpoint/2010/main">
-        <p14:section name="도입" id="{9f3ddf01-2550-8122-4c18-7ee1b5c36b1f}">
+        <p14:section name="도입" id="{891fd584-8eae-51db-0a94-b5c121bf5420}">
           <p14:sldIdLst>
             <p14:sldId id="256"/>
             <p14:sldId id="257"/>
           </p14:sldIdLst>
         </p14:section>
-        <p14:section name="개념" id="{8443c41a-08c4-69fc-c23c-7a2beea0897a}">
+        <p14:section name="개념" id="{5519de19-6308-a968-feca-fc7742aeb309}">
           <p14:sldIdLst>
             <p14:sldId id="258"/>
             <p14:sldId id="259"/>
@@ -135,31 +135,31 @@
             <p14:sldId id="263"/>
           </p14:sldIdLst>
         </p14:section>
-        <p14:section name="연습" id="{9baaf4fc-98e2-3027-8731-cc6166d401c5}">
+        <p14:section name="연습" id="{38d25c17-a568-745f-2b44-bfcf62987e81}">
           <p14:sldIdLst>
             <p14:sldId id="262"/>
             <p14:sldId id="264"/>
             <p14:sldId id="265"/>
           </p14:sldIdLst>
         </p14:section>
-        <p14:section name="개념" id="{f50c269e-2c0c-9615-efe0-547de0510bdc}">
+        <p14:section name="개념" id="{b7659ede-b92f-534d-091c-86e20fd707ef}">
           <p14:sldIdLst/>
         </p14:section>
-        <p14:section name="연습" id="{828b2d30-958e-d979-0208-7fd74e079c82}">
+        <p14:section name="연습" id="{7da237a5-62e2-fdae-13fb-fa026ce1c170}">
           <p14:sldIdLst/>
         </p14:section>
-        <p14:section name="확인" id="{5323c7ee-cc9f-19d7-2bae-954107636156}">
+        <p14:section name="확인" id="{7cc1d5e6-1796-3392-b4c5-69e7362909bc}">
           <p14:sldIdLst>
             <p14:sldId id="266"/>
             <p14:sldId id="267"/>
           </p14:sldIdLst>
         </p14:section>
-        <p14:section name="정리" id="{d8a163cc-ebd9-5c35-c0ad-d31f9a80f5cb}">
+        <p14:section name="정리" id="{32535fc9-3662-f478-408c-1c47d4a79d83}">
           <p14:sldIdLst>
             <p14:sldId id="268"/>
           </p14:sldIdLst>
         </p14:section>
-        <p14:section name="보충" id="{59b37d2a-9ea7-91d1-e287-c132f514f250}">
+        <p14:section name="보충" id="{b37d0510-c8e0-eb06-ae49-32317e82cb3c}">
           <p14:sldIdLst>
             <p14:sldId id="269"/>
           </p14:sldIdLst>
@@ -2865,7 +2865,7 @@
           </p:nvPr>
         </p:nvGraphicFramePr>
         <p:xfrm>
-          <a:off x="7726680" y="965200"/>
+          <a:off x="7726680" y="1000760"/>
           <a:ext cx="3840480" cy="914400"/>
         </p:xfrm>
         <a:graphic>
@@ -2878,7 +2878,7 @@
                 <a:gridCol w="960120"/>
                 <a:gridCol w="960120"/>
               </a:tblGrid>
-              <a:tr h="568960">
+              <a:tr h="551180">
                 <a:tc>
                   <a:txBody>
                     <a:bodyPr/>
@@ -3141,7 +3141,7 @@
                   </a:tcPr>
                 </a:tc>
               </a:tr>
-              <a:tr h="568960">
+              <a:tr h="551180">
                 <a:tc>
                   <a:txBody>
                     <a:bodyPr/>
@@ -3404,7 +3404,7 @@
                   </a:tcPr>
                 </a:tc>
               </a:tr>
-              <a:tr h="568960">
+              <a:tr h="551180">
                 <a:tc>
                   <a:txBody>
                     <a:bodyPr/>
@@ -3678,7 +3678,7 @@
                   </a:tcPr>
                 </a:tc>
               </a:tr>
-              <a:tr h="568960">
+              <a:tr h="551180">
                 <a:tc>
                   <a:txBody>
                     <a:bodyPr/>
@@ -6189,7 +6189,7 @@
           </p:nvPr>
         </p:nvGraphicFramePr>
         <p:xfrm>
-          <a:off x="8063728" y="2042160"/>
+          <a:off x="8063728" y="2089785"/>
           <a:ext cx="3291840" cy="914400"/>
         </p:xfrm>
         <a:graphic>
@@ -6201,7 +6201,7 @@
                 <a:gridCol w="1097280"/>
                 <a:gridCol w="1097280"/>
               </a:tblGrid>
-              <a:tr h="609600">
+              <a:tr h="590550">
                 <a:tc>
                   <a:txBody>
                     <a:bodyPr/>
@@ -6396,7 +6396,7 @@
                   </a:tcPr>
                 </a:tc>
               </a:tr>
-              <a:tr h="609600">
+              <a:tr h="590550">
                 <a:tc>
                   <a:txBody>
                     <a:bodyPr/>
@@ -6591,7 +6591,7 @@
                   </a:tcPr>
                 </a:tc>
               </a:tr>
-              <a:tr h="609600">
+              <a:tr h="590550">
                 <a:tc>
                   <a:txBody>
                     <a:bodyPr/>
@@ -6786,7 +6786,7 @@
                   </a:tcPr>
                 </a:tc>
               </a:tr>
-              <a:tr h="609600">
+              <a:tr h="590550">
                 <a:tc>
                   <a:txBody>
                     <a:bodyPr/>
@@ -6992,7 +6992,7 @@
                   </a:tcPr>
                 </a:tc>
               </a:tr>
-              <a:tr h="609600">
+              <a:tr h="590550">
                 <a:tc>
                   <a:txBody>
                     <a:bodyPr/>
@@ -8089,7 +8089,7 @@
           </p:nvPr>
         </p:nvGraphicFramePr>
         <p:xfrm>
-          <a:off x="2162556" y="2322830"/>
+          <a:off x="2162556" y="2355850"/>
           <a:ext cx="7863840" cy="914400"/>
         </p:xfrm>
         <a:graphic>
@@ -8102,7 +8102,7 @@
                 <a:gridCol w="1808683"/>
                 <a:gridCol w="1808683"/>
               </a:tblGrid>
-              <a:tr h="528320">
+              <a:tr h="511810">
                 <a:tc>
                   <a:txBody>
                     <a:bodyPr/>
@@ -8365,7 +8365,7 @@
                   </a:tcPr>
                 </a:tc>
               </a:tr>
-              <a:tr h="528320">
+              <a:tr h="511810">
                 <a:tc>
                   <a:txBody>
                     <a:bodyPr/>
@@ -8639,7 +8639,7 @@
                   </a:tcPr>
                 </a:tc>
               </a:tr>
-              <a:tr h="528320">
+              <a:tr h="511810">
                 <a:tc>
                   <a:txBody>
                     <a:bodyPr/>
@@ -8913,7 +8913,7 @@
                   </a:tcPr>
                 </a:tc>
               </a:tr>
-              <a:tr h="528320">
+              <a:tr h="511810">
                 <a:tc>
                   <a:txBody>
                     <a:bodyPr/>
@@ -9428,7 +9428,7 @@
           </p:nvPr>
         </p:nvGraphicFramePr>
         <p:xfrm>
-          <a:off x="7483450" y="2042160"/>
+          <a:off x="7483450" y="2089785"/>
           <a:ext cx="4023360" cy="914400"/>
         </p:xfrm>
         <a:graphic>
@@ -9441,7 +9441,7 @@
                 <a:gridCol w="1005840"/>
                 <a:gridCol w="1005840"/>
               </a:tblGrid>
-              <a:tr h="609600">
+              <a:tr h="590550">
                 <a:tc>
                   <a:txBody>
                     <a:bodyPr/>
@@ -9704,7 +9704,7 @@
                   </a:tcPr>
                 </a:tc>
               </a:tr>
-              <a:tr h="609600">
+              <a:tr h="590550">
                 <a:tc>
                   <a:txBody>
                     <a:bodyPr/>
@@ -9956,7 +9956,7 @@
                   </a:tcPr>
                 </a:tc>
               </a:tr>
-              <a:tr h="609600">
+              <a:tr h="590550">
                 <a:tc>
                   <a:txBody>
                     <a:bodyPr/>
@@ -10219,7 +10219,7 @@
                   </a:tcPr>
                 </a:tc>
               </a:tr>
-              <a:tr h="609600">
+              <a:tr h="590550">
                 <a:tc>
                   <a:txBody>
                     <a:bodyPr/>
@@ -10493,7 +10493,7 @@
                   </a:tcPr>
                 </a:tc>
               </a:tr>
-              <a:tr h="609600">
+              <a:tr h="590550">
                 <a:tc>
                   <a:txBody>
                     <a:bodyPr/>
@@ -11367,7 +11367,7 @@
           </p:nvPr>
         </p:nvGraphicFramePr>
         <p:xfrm>
-          <a:off x="7483450" y="2042160"/>
+          <a:off x="7483450" y="2089785"/>
           <a:ext cx="4023360" cy="914400"/>
         </p:xfrm>
         <a:graphic>
@@ -11380,7 +11380,7 @@
                 <a:gridCol w="1005840"/>
                 <a:gridCol w="1005840"/>
               </a:tblGrid>
-              <a:tr h="609600">
+              <a:tr h="590550">
                 <a:tc>
                   <a:txBody>
                     <a:bodyPr/>
@@ -11643,7 +11643,7 @@
                   </a:tcPr>
                 </a:tc>
               </a:tr>
-              <a:tr h="609600">
+              <a:tr h="590550">
                 <a:tc>
                   <a:txBody>
                     <a:bodyPr/>
@@ -11895,7 +11895,7 @@
                   </a:tcPr>
                 </a:tc>
               </a:tr>
-              <a:tr h="609600">
+              <a:tr h="590550">
                 <a:tc>
                   <a:txBody>
                     <a:bodyPr/>
@@ -12158,7 +12158,7 @@
                   </a:tcPr>
                 </a:tc>
               </a:tr>
-              <a:tr h="609600">
+              <a:tr h="590550">
                 <a:tc>
                   <a:txBody>
                     <a:bodyPr/>
@@ -12432,7 +12432,7 @@
                   </a:tcPr>
                 </a:tc>
               </a:tr>
-              <a:tr h="609600">
+              <a:tr h="590550">
                 <a:tc>
                   <a:txBody>
                     <a:bodyPr/>
@@ -13289,7 +13289,7 @@
           </p:nvPr>
         </p:nvGraphicFramePr>
         <p:xfrm>
-          <a:off x="7483450" y="2103120"/>
+          <a:off x="7483450" y="2030730"/>
           <a:ext cx="4023360" cy="914400"/>
         </p:xfrm>
         <a:graphic>
@@ -13302,7 +13302,7 @@
                 <a:gridCol w="1005840"/>
                 <a:gridCol w="1005840"/>
               </a:tblGrid>
-              <a:tr h="487680">
+              <a:tr h="511810">
                 <a:tc>
                   <a:txBody>
                     <a:bodyPr/>
@@ -13311,7 +13311,7 @@
                       <a:pPr eaLnBrk="0" algn="ctr" indent="0" marL="0">
                         <a:buNone/>
                       </a:pPr>
-                      <a:endParaRPr lang="en-US" sz="2400" dirty="0">
+                      <a:endParaRPr lang="en-US" sz="2600" dirty="0">
                         <a:latin typeface="맑은 고딕" charset="0"/>
                         <a:ea typeface="맑은 고딕" charset="0"/>
                         <a:cs typeface="맑은 고딕" charset="0"/>
@@ -13369,7 +13369,7 @@
                         <a:buNone/>
                       </a:pPr>
                       <a:r>
-                        <a:rPr lang="en-US" sz="2400" b="1" dirty="0">
+                        <a:rPr lang="en-US" sz="2600" b="1" dirty="0">
                           <a:solidFill>
                             <a:srgbClr val="1F2937"/>
                           </a:solidFill>
@@ -13379,7 +13379,7 @@
                         </a:rPr>
                         <a:t>백</a:t>
                       </a:r>
-                      <a:endParaRPr lang="en-US" sz="2400" dirty="0">
+                      <a:endParaRPr lang="en-US" sz="2600" dirty="0">
                         <a:latin typeface="맑은 고딕" charset="0"/>
                         <a:ea typeface="맑은 고딕" charset="0"/>
                         <a:cs typeface="맑은 고딕" charset="0"/>
@@ -13437,7 +13437,7 @@
                         <a:buNone/>
                       </a:pPr>
                       <a:r>
-                        <a:rPr lang="en-US" sz="2400" b="1" dirty="0">
+                        <a:rPr lang="en-US" sz="2600" b="1" dirty="0">
                           <a:solidFill>
                             <a:srgbClr val="1F2937"/>
                           </a:solidFill>
@@ -13447,7 +13447,7 @@
                         </a:rPr>
                         <a:t>십</a:t>
                       </a:r>
-                      <a:endParaRPr lang="en-US" sz="2400" dirty="0">
+                      <a:endParaRPr lang="en-US" sz="2600" dirty="0">
                         <a:latin typeface="맑은 고딕" charset="0"/>
                         <a:ea typeface="맑은 고딕" charset="0"/>
                         <a:cs typeface="맑은 고딕" charset="0"/>
@@ -13505,7 +13505,7 @@
                         <a:buNone/>
                       </a:pPr>
                       <a:r>
-                        <a:rPr lang="en-US" sz="2400" b="1" dirty="0">
+                        <a:rPr lang="en-US" sz="2600" b="1" dirty="0">
                           <a:solidFill>
                             <a:srgbClr val="1F2937"/>
                           </a:solidFill>
@@ -13515,7 +13515,7 @@
                         </a:rPr>
                         <a:t>일</a:t>
                       </a:r>
-                      <a:endParaRPr lang="en-US" sz="2400" dirty="0">
+                      <a:endParaRPr lang="en-US" sz="2600" dirty="0">
                         <a:latin typeface="맑은 고딕" charset="0"/>
                         <a:ea typeface="맑은 고딕" charset="0"/>
                         <a:cs typeface="맑은 고딕" charset="0"/>
@@ -13565,7 +13565,7 @@
                   </a:tcPr>
                 </a:tc>
               </a:tr>
-              <a:tr h="487680">
+              <a:tr h="511810">
                 <a:tc>
                   <a:txBody>
                     <a:bodyPr/>
@@ -13574,7 +13574,7 @@
                       <a:pPr eaLnBrk="0" algn="ctr" indent="0" marL="0">
                         <a:buNone/>
                       </a:pPr>
-                      <a:endParaRPr lang="en-US" sz="2400" dirty="0">
+                      <a:endParaRPr lang="en-US" sz="2600" dirty="0">
                         <a:latin typeface="맑은 고딕" charset="0"/>
                         <a:ea typeface="맑은 고딕" charset="0"/>
                         <a:cs typeface="맑은 고딕" charset="0"/>
@@ -13632,7 +13632,7 @@
                         <a:buNone/>
                       </a:pPr>
                       <a:r>
-                        <a:rPr lang="en-US" sz="2400" dirty="0">
+                        <a:rPr lang="en-US" sz="2600" dirty="0">
                           <a:solidFill>
                             <a:srgbClr val="1F2937"/>
                           </a:solidFill>
@@ -13642,7 +13642,7 @@
                         </a:rPr>
                         <a:t>3</a:t>
                       </a:r>
-                      <a:endParaRPr lang="en-US" sz="2400" dirty="0">
+                      <a:endParaRPr lang="en-US" sz="2600" dirty="0">
                         <a:latin typeface="맑은 고딕" charset="0"/>
                         <a:ea typeface="맑은 고딕" charset="0"/>
                         <a:cs typeface="맑은 고딕" charset="0"/>
@@ -13700,7 +13700,7 @@
                         <a:buNone/>
                       </a:pPr>
                       <a:r>
-                        <a:rPr lang="en-US" sz="2400" dirty="0">
+                        <a:rPr lang="en-US" sz="2600" dirty="0">
                           <a:solidFill>
                             <a:srgbClr val="1F2937"/>
                           </a:solidFill>
@@ -13710,7 +13710,7 @@
                         </a:rPr>
                         <a:t>10</a:t>
                       </a:r>
-                      <a:endParaRPr lang="en-US" sz="2400" dirty="0">
+                      <a:endParaRPr lang="en-US" sz="2600" dirty="0">
                         <a:latin typeface="맑은 고딕" charset="0"/>
                         <a:ea typeface="맑은 고딕" charset="0"/>
                         <a:cs typeface="맑은 고딕" charset="0"/>
@@ -13767,7 +13767,7 @@
                       <a:pPr eaLnBrk="0" algn="ctr" indent="0" marL="0">
                         <a:buNone/>
                       </a:pPr>
-                      <a:endParaRPr lang="en-US" sz="2400" dirty="0">
+                      <a:endParaRPr lang="en-US" sz="2600" dirty="0">
                         <a:latin typeface="맑은 고딕" charset="0"/>
                         <a:ea typeface="맑은 고딕" charset="0"/>
                         <a:cs typeface="맑은 고딕" charset="0"/>
@@ -13817,7 +13817,7 @@
                   </a:tcPr>
                 </a:tc>
               </a:tr>
-              <a:tr h="487680">
+              <a:tr h="511810">
                 <a:tc>
                   <a:txBody>
                     <a:bodyPr/>
@@ -13826,7 +13826,7 @@
                       <a:pPr eaLnBrk="0" algn="ctr" indent="0" marL="0">
                         <a:buNone/>
                       </a:pPr>
-                      <a:endParaRPr lang="en-US" sz="2400" dirty="0">
+                      <a:endParaRPr lang="en-US" sz="2600" dirty="0">
                         <a:latin typeface="맑은 고딕" charset="0"/>
                         <a:ea typeface="맑은 고딕" charset="0"/>
                         <a:cs typeface="맑은 고딕" charset="0"/>
@@ -13883,7 +13883,7 @@
                       <a:pPr eaLnBrk="0" algn="ctr" indent="0" marL="0">
                         <a:buNone/>
                       </a:pPr>
-                      <a:endParaRPr lang="en-US" sz="2400" dirty="0">
+                      <a:endParaRPr lang="en-US" sz="2600" dirty="0">
                         <a:latin typeface="맑은 고딕" charset="0"/>
                         <a:ea typeface="맑은 고딕" charset="0"/>
                         <a:cs typeface="맑은 고딕" charset="0"/>
@@ -13941,7 +13941,7 @@
                         <a:buNone/>
                       </a:pPr>
                       <a:r>
-                        <a:rPr lang="en-US" sz="2400" dirty="0">
+                        <a:rPr lang="en-US" sz="2600" dirty="0">
                           <a:solidFill>
                             <a:srgbClr val="1F2937"/>
                           </a:solidFill>
@@ -13951,7 +13951,7 @@
                         </a:rPr>
                         <a:t>1</a:t>
                       </a:r>
-                      <a:endParaRPr lang="en-US" sz="2400" dirty="0">
+                      <a:endParaRPr lang="en-US" sz="2600" dirty="0">
                         <a:latin typeface="맑은 고딕" charset="0"/>
                         <a:ea typeface="맑은 고딕" charset="0"/>
                         <a:cs typeface="맑은 고딕" charset="0"/>
@@ -14009,7 +14009,7 @@
                         <a:buNone/>
                       </a:pPr>
                       <a:r>
-                        <a:rPr lang="en-US" sz="2400" dirty="0">
+                        <a:rPr lang="en-US" sz="2600" dirty="0">
                           <a:solidFill>
                             <a:srgbClr val="1F2937"/>
                           </a:solidFill>
@@ -14019,7 +14019,7 @@
                         </a:rPr>
                         <a:t>10</a:t>
                       </a:r>
-                      <a:endParaRPr lang="en-US" sz="2400" dirty="0">
+                      <a:endParaRPr lang="en-US" sz="2600" dirty="0">
                         <a:latin typeface="맑은 고딕" charset="0"/>
                         <a:ea typeface="맑은 고딕" charset="0"/>
                         <a:cs typeface="맑은 고딕" charset="0"/>
@@ -14069,7 +14069,7 @@
                   </a:tcPr>
                 </a:tc>
               </a:tr>
-              <a:tr h="487680">
+              <a:tr h="511810">
                 <a:tc>
                   <a:txBody>
                     <a:bodyPr/>
@@ -14078,7 +14078,7 @@
                       <a:pPr eaLnBrk="0" algn="ctr" indent="0" marL="0">
                         <a:buNone/>
                       </a:pPr>
-                      <a:endParaRPr lang="en-US" sz="2400" dirty="0">
+                      <a:endParaRPr lang="en-US" sz="2600" dirty="0">
                         <a:latin typeface="맑은 고딕" charset="0"/>
                         <a:ea typeface="맑은 고딕" charset="0"/>
                         <a:cs typeface="맑은 고딕" charset="0"/>
@@ -14136,7 +14136,7 @@
                         <a:buNone/>
                       </a:pPr>
                       <a:r>
-                        <a:rPr lang="en-US" sz="2400" dirty="0">
+                        <a:rPr lang="en-US" sz="2600" dirty="0">
                           <a:solidFill>
                             <a:srgbClr val="1F2937"/>
                           </a:solidFill>
@@ -14146,7 +14146,7 @@
                         </a:rPr>
                         <a:t>4</a:t>
                       </a:r>
-                      <a:endParaRPr lang="en-US" sz="2400" dirty="0">
+                      <a:endParaRPr lang="en-US" sz="2600" dirty="0">
                         <a:latin typeface="맑은 고딕" charset="0"/>
                         <a:ea typeface="맑은 고딕" charset="0"/>
                         <a:cs typeface="맑은 고딕" charset="0"/>
@@ -14204,7 +14204,7 @@
                         <a:buNone/>
                       </a:pPr>
                       <a:r>
-                        <a:rPr lang="en-US" sz="2400" dirty="0">
+                        <a:rPr lang="en-US" sz="2600" dirty="0">
                           <a:solidFill>
                             <a:srgbClr val="1F2937"/>
                           </a:solidFill>
@@ -14214,7 +14214,7 @@
                         </a:rPr>
                         <a:t>2</a:t>
                       </a:r>
-                      <a:endParaRPr lang="en-US" sz="2400" dirty="0">
+                      <a:endParaRPr lang="en-US" sz="2600" dirty="0">
                         <a:latin typeface="맑은 고딕" charset="0"/>
                         <a:ea typeface="맑은 고딕" charset="0"/>
                         <a:cs typeface="맑은 고딕" charset="0"/>
@@ -14272,7 +14272,7 @@
                         <a:buNone/>
                       </a:pPr>
                       <a:r>
-                        <a:rPr lang="en-US" sz="2400" dirty="0">
+                        <a:rPr lang="en-US" sz="2600" dirty="0">
                           <a:solidFill>
                             <a:srgbClr val="1F2937"/>
                           </a:solidFill>
@@ -14282,7 +14282,7 @@
                         </a:rPr>
                         <a:t>3</a:t>
                       </a:r>
-                      <a:endParaRPr lang="en-US" sz="2400" dirty="0">
+                      <a:endParaRPr lang="en-US" sz="2600" dirty="0">
                         <a:latin typeface="맑은 고딕" charset="0"/>
                         <a:ea typeface="맑은 고딕" charset="0"/>
                         <a:cs typeface="맑은 고딕" charset="0"/>
@@ -14332,7 +14332,7 @@
                   </a:tcPr>
                 </a:tc>
               </a:tr>
-              <a:tr h="487680">
+              <a:tr h="511810">
                 <a:tc>
                   <a:txBody>
                     <a:bodyPr/>
@@ -14342,7 +14342,7 @@
                         <a:buNone/>
                       </a:pPr>
                       <a:r>
-                        <a:rPr lang="en-US" sz="2400" dirty="0">
+                        <a:rPr lang="en-US" sz="2600" dirty="0">
                           <a:solidFill>
                             <a:srgbClr val="1F2937"/>
                           </a:solidFill>
@@ -14352,7 +14352,7 @@
                         </a:rPr>
                         <a:t>−</a:t>
                       </a:r>
-                      <a:endParaRPr lang="en-US" sz="2400" dirty="0">
+                      <a:endParaRPr lang="en-US" sz="2600" dirty="0">
                         <a:latin typeface="맑은 고딕" charset="0"/>
                         <a:ea typeface="맑은 고딕" charset="0"/>
                         <a:cs typeface="맑은 고딕" charset="0"/>
@@ -14410,7 +14410,7 @@
                         <a:buNone/>
                       </a:pPr>
                       <a:r>
-                        <a:rPr lang="en-US" sz="2400" dirty="0">
+                        <a:rPr lang="en-US" sz="2600" dirty="0">
                           <a:solidFill>
                             <a:srgbClr val="1F2937"/>
                           </a:solidFill>
@@ -14420,7 +14420,7 @@
                         </a:rPr>
                         <a:t>1</a:t>
                       </a:r>
-                      <a:endParaRPr lang="en-US" sz="2400" dirty="0">
+                      <a:endParaRPr lang="en-US" sz="2600" dirty="0">
                         <a:latin typeface="맑은 고딕" charset="0"/>
                         <a:ea typeface="맑은 고딕" charset="0"/>
                         <a:cs typeface="맑은 고딕" charset="0"/>
@@ -14478,7 +14478,7 @@
                         <a:buNone/>
                       </a:pPr>
                       <a:r>
-                        <a:rPr lang="en-US" sz="2400" dirty="0">
+                        <a:rPr lang="en-US" sz="2600" dirty="0">
                           <a:solidFill>
                             <a:srgbClr val="1F2937"/>
                           </a:solidFill>
@@ -14488,7 +14488,7 @@
                         </a:rPr>
                         <a:t>5</a:t>
                       </a:r>
-                      <a:endParaRPr lang="en-US" sz="2400" dirty="0">
+                      <a:endParaRPr lang="en-US" sz="2600" dirty="0">
                         <a:latin typeface="맑은 고딕" charset="0"/>
                         <a:ea typeface="맑은 고딕" charset="0"/>
                         <a:cs typeface="맑은 고딕" charset="0"/>
@@ -14546,7 +14546,7 @@
                         <a:buNone/>
                       </a:pPr>
                       <a:r>
-                        <a:rPr lang="en-US" sz="2400" dirty="0">
+                        <a:rPr lang="en-US" sz="2600" dirty="0">
                           <a:solidFill>
                             <a:srgbClr val="1F2937"/>
                           </a:solidFill>
@@ -14556,7 +14556,7 @@
                         </a:rPr>
                         <a:t>6</a:t>
                       </a:r>
-                      <a:endParaRPr lang="en-US" sz="2400" dirty="0">
+                      <a:endParaRPr lang="en-US" sz="2600" dirty="0">
                         <a:latin typeface="맑은 고딕" charset="0"/>
                         <a:ea typeface="맑은 고딕" charset="0"/>
                         <a:cs typeface="맑은 고딕" charset="0"/>
@@ -14606,7 +14606,7 @@
                   </a:tcPr>
                 </a:tc>
               </a:tr>
-              <a:tr h="487680">
+              <a:tr h="511810">
                 <a:tc>
                   <a:txBody>
                     <a:bodyPr/>
@@ -14615,7 +14615,7 @@
                       <a:pPr eaLnBrk="0" algn="ctr" indent="0" marL="0">
                         <a:buNone/>
                       </a:pPr>
-                      <a:endParaRPr lang="en-US" sz="2400" dirty="0">
+                      <a:endParaRPr lang="en-US" sz="2600" dirty="0">
                         <a:latin typeface="맑은 고딕" charset="0"/>
                         <a:ea typeface="맑은 고딕" charset="0"/>
                         <a:cs typeface="맑은 고딕" charset="0"/>
@@ -14673,7 +14673,7 @@
                         <a:buNone/>
                       </a:pPr>
                       <a:r>
-                        <a:rPr lang="en-US" sz="2400" dirty="0">
+                        <a:rPr lang="en-US" sz="2600" dirty="0">
                           <a:solidFill>
                             <a:srgbClr val="1F2937"/>
                           </a:solidFill>
@@ -14683,7 +14683,7 @@
                         </a:rPr>
                         <a:t>2</a:t>
                       </a:r>
-                      <a:endParaRPr lang="en-US" sz="2400" dirty="0">
+                      <a:endParaRPr lang="en-US" sz="2600" dirty="0">
                         <a:latin typeface="맑은 고딕" charset="0"/>
                         <a:ea typeface="맑은 고딕" charset="0"/>
                         <a:cs typeface="맑은 고딕" charset="0"/>
@@ -14741,7 +14741,7 @@
                         <a:buNone/>
                       </a:pPr>
                       <a:r>
-                        <a:rPr lang="en-US" sz="2400" dirty="0">
+                        <a:rPr lang="en-US" sz="2600" dirty="0">
                           <a:solidFill>
                             <a:srgbClr val="1F2937"/>
                           </a:solidFill>
@@ -14751,7 +14751,7 @@
                         </a:rPr>
                         <a:t>6</a:t>
                       </a:r>
-                      <a:endParaRPr lang="en-US" sz="2400" dirty="0">
+                      <a:endParaRPr lang="en-US" sz="2600" dirty="0">
                         <a:latin typeface="맑은 고딕" charset="0"/>
                         <a:ea typeface="맑은 고딕" charset="0"/>
                         <a:cs typeface="맑은 고딕" charset="0"/>
@@ -14809,7 +14809,7 @@
                         <a:buNone/>
                       </a:pPr>
                       <a:r>
-                        <a:rPr lang="en-US" sz="2400" dirty="0">
+                        <a:rPr lang="en-US" sz="2600" dirty="0">
                           <a:solidFill>
                             <a:srgbClr val="1F2937"/>
                           </a:solidFill>
@@ -14819,7 +14819,7 @@
                         </a:rPr>
                         <a:t>7</a:t>
                       </a:r>
-                      <a:endParaRPr lang="en-US" sz="2400" dirty="0">
+                      <a:endParaRPr lang="en-US" sz="2600" dirty="0">
                         <a:latin typeface="맑은 고딕" charset="0"/>
                         <a:ea typeface="맑은 고딕" charset="0"/>
                         <a:cs typeface="맑은 고딕" charset="0"/>
@@ -15426,7 +15426,7 @@
           </p:nvPr>
         </p:nvGraphicFramePr>
         <p:xfrm>
-          <a:off x="6947154" y="2103120"/>
+          <a:off x="6947154" y="2057400"/>
           <a:ext cx="4023360" cy="914400"/>
         </p:xfrm>
         <a:graphic>
@@ -15439,7 +15439,7 @@
                 <a:gridCol w="1005840"/>
                 <a:gridCol w="1005840"/>
               </a:tblGrid>
-              <a:tr h="457200">
+              <a:tr h="472440">
                 <a:tc>
                   <a:txBody>
                     <a:bodyPr/>
@@ -15448,7 +15448,7 @@
                       <a:pPr eaLnBrk="0" algn="ctr" indent="0" marL="0">
                         <a:buNone/>
                       </a:pPr>
-                      <a:endParaRPr lang="en-US" sz="2200" dirty="0">
+                      <a:endParaRPr lang="en-US" sz="2400" dirty="0">
                         <a:latin typeface="맑은 고딕" charset="0"/>
                         <a:ea typeface="맑은 고딕" charset="0"/>
                         <a:cs typeface="맑은 고딕" charset="0"/>
@@ -15506,7 +15506,7 @@
                         <a:buNone/>
                       </a:pPr>
                       <a:r>
-                        <a:rPr lang="en-US" sz="2200" b="1" dirty="0">
+                        <a:rPr lang="en-US" sz="2400" b="1" dirty="0">
                           <a:solidFill>
                             <a:srgbClr val="1F2937"/>
                           </a:solidFill>
@@ -15516,7 +15516,7 @@
                         </a:rPr>
                         <a:t>백</a:t>
                       </a:r>
-                      <a:endParaRPr lang="en-US" sz="2200" dirty="0">
+                      <a:endParaRPr lang="en-US" sz="2400" dirty="0">
                         <a:latin typeface="맑은 고딕" charset="0"/>
                         <a:ea typeface="맑은 고딕" charset="0"/>
                         <a:cs typeface="맑은 고딕" charset="0"/>
@@ -15574,7 +15574,7 @@
                         <a:buNone/>
                       </a:pPr>
                       <a:r>
-                        <a:rPr lang="en-US" sz="2200" b="1" dirty="0">
+                        <a:rPr lang="en-US" sz="2400" b="1" dirty="0">
                           <a:solidFill>
                             <a:srgbClr val="1F2937"/>
                           </a:solidFill>
@@ -15584,7 +15584,7 @@
                         </a:rPr>
                         <a:t>십</a:t>
                       </a:r>
-                      <a:endParaRPr lang="en-US" sz="2200" dirty="0">
+                      <a:endParaRPr lang="en-US" sz="2400" dirty="0">
                         <a:latin typeface="맑은 고딕" charset="0"/>
                         <a:ea typeface="맑은 고딕" charset="0"/>
                         <a:cs typeface="맑은 고딕" charset="0"/>
@@ -15642,7 +15642,7 @@
                         <a:buNone/>
                       </a:pPr>
                       <a:r>
-                        <a:rPr lang="en-US" sz="2200" b="1" dirty="0">
+                        <a:rPr lang="en-US" sz="2400" b="1" dirty="0">
                           <a:solidFill>
                             <a:srgbClr val="1F2937"/>
                           </a:solidFill>
@@ -15652,7 +15652,7 @@
                         </a:rPr>
                         <a:t>일</a:t>
                       </a:r>
-                      <a:endParaRPr lang="en-US" sz="2200" dirty="0">
+                      <a:endParaRPr lang="en-US" sz="2400" dirty="0">
                         <a:latin typeface="맑은 고딕" charset="0"/>
                         <a:ea typeface="맑은 고딕" charset="0"/>
                         <a:cs typeface="맑은 고딕" charset="0"/>
@@ -15702,7 +15702,7 @@
                   </a:tcPr>
                 </a:tc>
               </a:tr>
-              <a:tr h="457200">
+              <a:tr h="472440">
                 <a:tc>
                   <a:txBody>
                     <a:bodyPr/>
@@ -15711,7 +15711,7 @@
                       <a:pPr eaLnBrk="0" algn="ctr" indent="0" marL="0">
                         <a:buNone/>
                       </a:pPr>
-                      <a:endParaRPr lang="en-US" sz="2200" dirty="0">
+                      <a:endParaRPr lang="en-US" sz="2400" dirty="0">
                         <a:latin typeface="맑은 고딕" charset="0"/>
                         <a:ea typeface="맑은 고딕" charset="0"/>
                         <a:cs typeface="맑은 고딕" charset="0"/>
@@ -15769,7 +15769,7 @@
                         <a:buNone/>
                       </a:pPr>
                       <a:r>
-                        <a:rPr lang="en-US" sz="2200" dirty="0">
+                        <a:rPr lang="en-US" sz="2400" dirty="0">
                           <a:solidFill>
                             <a:srgbClr val="1F2937"/>
                           </a:solidFill>
@@ -15779,7 +15779,7 @@
                         </a:rPr>
                         <a:t>□</a:t>
                       </a:r>
-                      <a:endParaRPr lang="en-US" sz="2200" dirty="0">
+                      <a:endParaRPr lang="en-US" sz="2400" dirty="0">
                         <a:latin typeface="맑은 고딕" charset="0"/>
                         <a:ea typeface="맑은 고딕" charset="0"/>
                         <a:cs typeface="맑은 고딕" charset="0"/>
@@ -15837,7 +15837,7 @@
                         <a:buNone/>
                       </a:pPr>
                       <a:r>
-                        <a:rPr lang="en-US" sz="2200" dirty="0">
+                        <a:rPr lang="en-US" sz="2400" dirty="0">
                           <a:solidFill>
                             <a:srgbClr val="1F2937"/>
                           </a:solidFill>
@@ -15847,7 +15847,7 @@
                         </a:rPr>
                         <a:t>□</a:t>
                       </a:r>
-                      <a:endParaRPr lang="en-US" sz="2200" dirty="0">
+                      <a:endParaRPr lang="en-US" sz="2400" dirty="0">
                         <a:latin typeface="맑은 고딕" charset="0"/>
                         <a:ea typeface="맑은 고딕" charset="0"/>
                         <a:cs typeface="맑은 고딕" charset="0"/>
@@ -15904,7 +15904,7 @@
                       <a:pPr eaLnBrk="0" algn="ctr" indent="0" marL="0">
                         <a:buNone/>
                       </a:pPr>
-                      <a:endParaRPr lang="en-US" sz="2200" dirty="0">
+                      <a:endParaRPr lang="en-US" sz="2400" dirty="0">
                         <a:latin typeface="맑은 고딕" charset="0"/>
                         <a:ea typeface="맑은 고딕" charset="0"/>
                         <a:cs typeface="맑은 고딕" charset="0"/>
@@ -15954,7 +15954,7 @@
                   </a:tcPr>
                 </a:tc>
               </a:tr>
-              <a:tr h="457200">
+              <a:tr h="472440">
                 <a:tc>
                   <a:txBody>
                     <a:bodyPr/>
@@ -15963,7 +15963,7 @@
                       <a:pPr eaLnBrk="0" algn="ctr" indent="0" marL="0">
                         <a:buNone/>
                       </a:pPr>
-                      <a:endParaRPr lang="en-US" sz="2200" dirty="0">
+                      <a:endParaRPr lang="en-US" sz="2400" dirty="0">
                         <a:latin typeface="맑은 고딕" charset="0"/>
                         <a:ea typeface="맑은 고딕" charset="0"/>
                         <a:cs typeface="맑은 고딕" charset="0"/>
@@ -16020,7 +16020,7 @@
                       <a:pPr eaLnBrk="0" algn="ctr" indent="0" marL="0">
                         <a:buNone/>
                       </a:pPr>
-                      <a:endParaRPr lang="en-US" sz="2200" dirty="0">
+                      <a:endParaRPr lang="en-US" sz="2400" dirty="0">
                         <a:latin typeface="맑은 고딕" charset="0"/>
                         <a:ea typeface="맑은 고딕" charset="0"/>
                         <a:cs typeface="맑은 고딕" charset="0"/>
@@ -16078,7 +16078,7 @@
                         <a:buNone/>
                       </a:pPr>
                       <a:r>
-                        <a:rPr lang="en-US" sz="2200" dirty="0">
+                        <a:rPr lang="en-US" sz="2400" dirty="0">
                           <a:solidFill>
                             <a:srgbClr val="1F2937"/>
                           </a:solidFill>
@@ -16088,7 +16088,7 @@
                         </a:rPr>
                         <a:t>□</a:t>
                       </a:r>
-                      <a:endParaRPr lang="en-US" sz="2200" dirty="0">
+                      <a:endParaRPr lang="en-US" sz="2400" dirty="0">
                         <a:latin typeface="맑은 고딕" charset="0"/>
                         <a:ea typeface="맑은 고딕" charset="0"/>
                         <a:cs typeface="맑은 고딕" charset="0"/>
@@ -16146,7 +16146,7 @@
                         <a:buNone/>
                       </a:pPr>
                       <a:r>
-                        <a:rPr lang="en-US" sz="2200" dirty="0">
+                        <a:rPr lang="en-US" sz="2400" dirty="0">
                           <a:solidFill>
                             <a:srgbClr val="1F2937"/>
                           </a:solidFill>
@@ -16156,7 +16156,7 @@
                         </a:rPr>
                         <a:t>□</a:t>
                       </a:r>
-                      <a:endParaRPr lang="en-US" sz="2200" dirty="0">
+                      <a:endParaRPr lang="en-US" sz="2400" dirty="0">
                         <a:latin typeface="맑은 고딕" charset="0"/>
                         <a:ea typeface="맑은 고딕" charset="0"/>
                         <a:cs typeface="맑은 고딕" charset="0"/>
@@ -16206,7 +16206,7 @@
                   </a:tcPr>
                 </a:tc>
               </a:tr>
-              <a:tr h="457200">
+              <a:tr h="472440">
                 <a:tc>
                   <a:txBody>
                     <a:bodyPr/>
@@ -16215,7 +16215,7 @@
                       <a:pPr eaLnBrk="0" algn="ctr" indent="0" marL="0">
                         <a:buNone/>
                       </a:pPr>
-                      <a:endParaRPr lang="en-US" sz="2200" dirty="0">
+                      <a:endParaRPr lang="en-US" sz="2400" dirty="0">
                         <a:latin typeface="맑은 고딕" charset="0"/>
                         <a:ea typeface="맑은 고딕" charset="0"/>
                         <a:cs typeface="맑은 고딕" charset="0"/>
@@ -16273,7 +16273,7 @@
                         <a:buNone/>
                       </a:pPr>
                       <a:r>
-                        <a:rPr lang="en-US" sz="2200" dirty="0">
+                        <a:rPr lang="en-US" sz="2400" dirty="0">
                           <a:solidFill>
                             <a:srgbClr val="1F2937"/>
                           </a:solidFill>
@@ -16283,7 +16283,7 @@
                         </a:rPr>
                         <a:t>7</a:t>
                       </a:r>
-                      <a:endParaRPr lang="en-US" sz="2200" dirty="0">
+                      <a:endParaRPr lang="en-US" sz="2400" dirty="0">
                         <a:latin typeface="맑은 고딕" charset="0"/>
                         <a:ea typeface="맑은 고딕" charset="0"/>
                         <a:cs typeface="맑은 고딕" charset="0"/>
@@ -16341,7 +16341,7 @@
                         <a:buNone/>
                       </a:pPr>
                       <a:r>
-                        <a:rPr lang="en-US" sz="2200" dirty="0">
+                        <a:rPr lang="en-US" sz="2400" dirty="0">
                           <a:solidFill>
                             <a:srgbClr val="1F2937"/>
                           </a:solidFill>
@@ -16351,7 +16351,7 @@
                         </a:rPr>
                         <a:t>3</a:t>
                       </a:r>
-                      <a:endParaRPr lang="en-US" sz="2200" dirty="0">
+                      <a:endParaRPr lang="en-US" sz="2400" dirty="0">
                         <a:latin typeface="맑은 고딕" charset="0"/>
                         <a:ea typeface="맑은 고딕" charset="0"/>
                         <a:cs typeface="맑은 고딕" charset="0"/>
@@ -16409,7 +16409,7 @@
                         <a:buNone/>
                       </a:pPr>
                       <a:r>
-                        <a:rPr lang="en-US" sz="2200" dirty="0">
+                        <a:rPr lang="en-US" sz="2400" dirty="0">
                           <a:solidFill>
                             <a:srgbClr val="1F2937"/>
                           </a:solidFill>
@@ -16419,7 +16419,7 @@
                         </a:rPr>
                         <a:t>2</a:t>
                       </a:r>
-                      <a:endParaRPr lang="en-US" sz="2200" dirty="0">
+                      <a:endParaRPr lang="en-US" sz="2400" dirty="0">
                         <a:latin typeface="맑은 고딕" charset="0"/>
                         <a:ea typeface="맑은 고딕" charset="0"/>
                         <a:cs typeface="맑은 고딕" charset="0"/>
@@ -16469,7 +16469,7 @@
                   </a:tcPr>
                 </a:tc>
               </a:tr>
-              <a:tr h="457200">
+              <a:tr h="472440">
                 <a:tc>
                   <a:txBody>
                     <a:bodyPr/>
@@ -16479,7 +16479,7 @@
                         <a:buNone/>
                       </a:pPr>
                       <a:r>
-                        <a:rPr lang="en-US" sz="2200" dirty="0">
+                        <a:rPr lang="en-US" sz="2400" dirty="0">
                           <a:solidFill>
                             <a:srgbClr val="1F2937"/>
                           </a:solidFill>
@@ -16489,7 +16489,7 @@
                         </a:rPr>
                         <a:t>−</a:t>
                       </a:r>
-                      <a:endParaRPr lang="en-US" sz="2200" dirty="0">
+                      <a:endParaRPr lang="en-US" sz="2400" dirty="0">
                         <a:latin typeface="맑은 고딕" charset="0"/>
                         <a:ea typeface="맑은 고딕" charset="0"/>
                         <a:cs typeface="맑은 고딕" charset="0"/>
@@ -16547,7 +16547,7 @@
                         <a:buNone/>
                       </a:pPr>
                       <a:r>
-                        <a:rPr lang="en-US" sz="2200" dirty="0">
+                        <a:rPr lang="en-US" sz="2400" dirty="0">
                           <a:solidFill>
                             <a:srgbClr val="1F2937"/>
                           </a:solidFill>
@@ -16557,7 +16557,7 @@
                         </a:rPr>
                         <a:t>4</a:t>
                       </a:r>
-                      <a:endParaRPr lang="en-US" sz="2200" dirty="0">
+                      <a:endParaRPr lang="en-US" sz="2400" dirty="0">
                         <a:latin typeface="맑은 고딕" charset="0"/>
                         <a:ea typeface="맑은 고딕" charset="0"/>
                         <a:cs typeface="맑은 고딕" charset="0"/>
@@ -16615,7 +16615,7 @@
                         <a:buNone/>
                       </a:pPr>
                       <a:r>
-                        <a:rPr lang="en-US" sz="2200" dirty="0">
+                        <a:rPr lang="en-US" sz="2400" dirty="0">
                           <a:solidFill>
                             <a:srgbClr val="1F2937"/>
                           </a:solidFill>
@@ -16625,7 +16625,7 @@
                         </a:rPr>
                         <a:t>5</a:t>
                       </a:r>
-                      <a:endParaRPr lang="en-US" sz="2200" dirty="0">
+                      <a:endParaRPr lang="en-US" sz="2400" dirty="0">
                         <a:latin typeface="맑은 고딕" charset="0"/>
                         <a:ea typeface="맑은 고딕" charset="0"/>
                         <a:cs typeface="맑은 고딕" charset="0"/>
@@ -16683,7 +16683,7 @@
                         <a:buNone/>
                       </a:pPr>
                       <a:r>
-                        <a:rPr lang="en-US" sz="2200" dirty="0">
+                        <a:rPr lang="en-US" sz="2400" dirty="0">
                           <a:solidFill>
                             <a:srgbClr val="1F2937"/>
                           </a:solidFill>
@@ -16693,7 +16693,7 @@
                         </a:rPr>
                         <a:t>8</a:t>
                       </a:r>
-                      <a:endParaRPr lang="en-US" sz="2200" dirty="0">
+                      <a:endParaRPr lang="en-US" sz="2400" dirty="0">
                         <a:latin typeface="맑은 고딕" charset="0"/>
                         <a:ea typeface="맑은 고딕" charset="0"/>
                         <a:cs typeface="맑은 고딕" charset="0"/>
@@ -16743,7 +16743,7 @@
                   </a:tcPr>
                 </a:tc>
               </a:tr>
-              <a:tr h="457200">
+              <a:tr h="472440">
                 <a:tc>
                   <a:txBody>
                     <a:bodyPr/>
@@ -16752,7 +16752,7 @@
                       <a:pPr eaLnBrk="0" algn="ctr" indent="0" marL="0">
                         <a:buNone/>
                       </a:pPr>
-                      <a:endParaRPr lang="en-US" sz="2200" dirty="0">
+                      <a:endParaRPr lang="en-US" sz="2400" dirty="0">
                         <a:latin typeface="맑은 고딕" charset="0"/>
                         <a:ea typeface="맑은 고딕" charset="0"/>
                         <a:cs typeface="맑은 고딕" charset="0"/>
@@ -16810,7 +16810,7 @@
                         <a:buNone/>
                       </a:pPr>
                       <a:r>
-                        <a:rPr lang="en-US" sz="2200" dirty="0">
+                        <a:rPr lang="en-US" sz="2400" dirty="0">
                           <a:solidFill>
                             <a:srgbClr val="1F2937"/>
                           </a:solidFill>
@@ -16820,7 +16820,7 @@
                         </a:rPr>
                         <a:t>□</a:t>
                       </a:r>
-                      <a:endParaRPr lang="en-US" sz="2200" dirty="0">
+                      <a:endParaRPr lang="en-US" sz="2400" dirty="0">
                         <a:latin typeface="맑은 고딕" charset="0"/>
                         <a:ea typeface="맑은 고딕" charset="0"/>
                         <a:cs typeface="맑은 고딕" charset="0"/>
@@ -16878,7 +16878,7 @@
                         <a:buNone/>
                       </a:pPr>
                       <a:r>
-                        <a:rPr lang="en-US" sz="2200" dirty="0">
+                        <a:rPr lang="en-US" sz="2400" dirty="0">
                           <a:solidFill>
                             <a:srgbClr val="1F2937"/>
                           </a:solidFill>
@@ -16888,7 +16888,7 @@
                         </a:rPr>
                         <a:t>□</a:t>
                       </a:r>
-                      <a:endParaRPr lang="en-US" sz="2200" dirty="0">
+                      <a:endParaRPr lang="en-US" sz="2400" dirty="0">
                         <a:latin typeface="맑은 고딕" charset="0"/>
                         <a:ea typeface="맑은 고딕" charset="0"/>
                         <a:cs typeface="맑은 고딕" charset="0"/>
@@ -16946,7 +16946,7 @@
                         <a:buNone/>
                       </a:pPr>
                       <a:r>
-                        <a:rPr lang="en-US" sz="2200" dirty="0">
+                        <a:rPr lang="en-US" sz="2400" dirty="0">
                           <a:solidFill>
                             <a:srgbClr val="1F2937"/>
                           </a:solidFill>
@@ -16956,7 +16956,7 @@
                         </a:rPr>
                         <a:t>□</a:t>
                       </a:r>
-                      <a:endParaRPr lang="en-US" sz="2200" dirty="0">
+                      <a:endParaRPr lang="en-US" sz="2400" dirty="0">
                         <a:latin typeface="맑은 고딕" charset="0"/>
                         <a:ea typeface="맑은 고딕" charset="0"/>
                         <a:cs typeface="맑은 고딕" charset="0"/>
@@ -17505,7 +17505,7 @@
           </p:nvPr>
         </p:nvGraphicFramePr>
         <p:xfrm>
-          <a:off x="7483450" y="2042160"/>
+          <a:off x="7483450" y="2089785"/>
           <a:ext cx="4023360" cy="914400"/>
         </p:xfrm>
         <a:graphic>
@@ -17518,7 +17518,7 @@
                 <a:gridCol w="1005840"/>
                 <a:gridCol w="1005840"/>
               </a:tblGrid>
-              <a:tr h="609600">
+              <a:tr h="590550">
                 <a:tc>
                   <a:txBody>
                     <a:bodyPr/>
@@ -17781,7 +17781,7 @@
                   </a:tcPr>
                 </a:tc>
               </a:tr>
-              <a:tr h="609600">
+              <a:tr h="590550">
                 <a:tc>
                   <a:txBody>
                     <a:bodyPr/>
@@ -18033,7 +18033,7 @@
                   </a:tcPr>
                 </a:tc>
               </a:tr>
-              <a:tr h="609600">
+              <a:tr h="590550">
                 <a:tc>
                   <a:txBody>
                     <a:bodyPr/>
@@ -18296,7 +18296,7 @@
                   </a:tcPr>
                 </a:tc>
               </a:tr>
-              <a:tr h="609600">
+              <a:tr h="590550">
                 <a:tc>
                   <a:txBody>
                     <a:bodyPr/>
@@ -18570,7 +18570,7 @@
                   </a:tcPr>
                 </a:tc>
               </a:tr>
-              <a:tr h="609600">
+              <a:tr h="590550">
                 <a:tc>
                   <a:txBody>
                     <a:bodyPr/>

--- a/dist/초3/수학/자연수계산/초3_수학_자연수계산_02_세자리수의뺄셈_학생용.pptx
+++ b/dist/초3/수학/자연수계산/초3_수학_자연수계산_02_세자리수의뺄셈_학생용.pptx
@@ -120,13 +120,13 @@
   <p:extLst>
     <p:ext uri="{521415D9-36F7-43E2-AB2F-B90AF26B5E84}">
       <p14:sectionLst xmlns:p14="http://schemas.microsoft.com/office/powerpoint/2010/main">
-        <p14:section name="도입" id="{891fd584-8eae-51db-0a94-b5c121bf5420}">
+        <p14:section name="도입" id="{714b76f7-21e6-74d9-173e-c949f7b32e33}">
           <p14:sldIdLst>
             <p14:sldId id="256"/>
             <p14:sldId id="257"/>
           </p14:sldIdLst>
         </p14:section>
-        <p14:section name="개념" id="{5519de19-6308-a968-feca-fc7742aeb309}">
+        <p14:section name="개념" id="{d5e34a0b-7477-eaf8-9b89-fd4272359e7e}">
           <p14:sldIdLst>
             <p14:sldId id="258"/>
             <p14:sldId id="259"/>
@@ -135,31 +135,31 @@
             <p14:sldId id="263"/>
           </p14:sldIdLst>
         </p14:section>
-        <p14:section name="연습" id="{38d25c17-a568-745f-2b44-bfcf62987e81}">
+        <p14:section name="연습" id="{05830f17-f152-cd6f-50c3-0c1b0ce4c43a}">
           <p14:sldIdLst>
             <p14:sldId id="262"/>
             <p14:sldId id="264"/>
             <p14:sldId id="265"/>
           </p14:sldIdLst>
         </p14:section>
-        <p14:section name="개념" id="{b7659ede-b92f-534d-091c-86e20fd707ef}">
+        <p14:section name="개념" id="{2ad2c93e-6b5b-8671-8cc1-27b30a963cfe}">
           <p14:sldIdLst/>
         </p14:section>
-        <p14:section name="연습" id="{7da237a5-62e2-fdae-13fb-fa026ce1c170}">
+        <p14:section name="연습" id="{bfde1d69-c96f-4c91-ca7a-5d1090b9fbcf}">
           <p14:sldIdLst/>
         </p14:section>
-        <p14:section name="확인" id="{7cc1d5e6-1796-3392-b4c5-69e7362909bc}">
+        <p14:section name="확인" id="{ca69f4fd-1dbc-fe0b-ee22-931ff4964571}">
           <p14:sldIdLst>
             <p14:sldId id="266"/>
             <p14:sldId id="267"/>
           </p14:sldIdLst>
         </p14:section>
-        <p14:section name="정리" id="{32535fc9-3662-f478-408c-1c47d4a79d83}">
+        <p14:section name="정리" id="{f2dc2cc2-81d6-5a81-c8f2-dc5db88e3e1a}">
           <p14:sldIdLst>
             <p14:sldId id="268"/>
           </p14:sldIdLst>
         </p14:section>
-        <p14:section name="보충" id="{b37d0510-c8e0-eb06-ae49-32317e82cb3c}">
+        <p14:section name="보충" id="{28fbe94c-17b1-239a-e791-b7ea42ce8e6f}">
           <p14:sldIdLst>
             <p14:sldId id="269"/>
           </p14:sldIdLst>
